--- a/slides/exp17_19_overview.pptx
+++ b/slides/exp17_19_overview.pptx
@@ -4243,8 +4243,8 @@
         </p:nvSpPr>
         <p:spPr>
           <a:xfrm>
-            <a:off x="6537960" y="3383280"/>
-            <a:ext cx="5212080" cy="2011680"/>
+            <a:off x="6537960" y="3291840"/>
+            <a:ext cx="5212080" cy="2194560"/>
           </a:xfrm>
           <a:prstGeom prst="rect">
             <a:avLst/>
@@ -4269,7 +4269,7 @@
               </a:defRPr>
             </a:pPr>
             <a:r>
-              <a:t>• TFs scored (n≥50 cells): 1084   |   cell types: 172</a:t>
+              <a:t>• TFs scored (n≥50): 1084  |  cell types: 172  |  shared genes: 6557</a:t>
             </a:r>
           </a:p>
           <a:p>
@@ -4285,7 +4285,7 @@
               </a:defRPr>
             </a:pPr>
             <a:r>
-              <a:t>• shared genes used: 6557  (discriminative half: 3278)</a:t>
+              <a:t>• cosine specificity: median 0.067, q90 0.109, max 0.394</a:t>
             </a:r>
           </a:p>
           <a:p>
@@ -4301,7 +4301,7 @@
               </a:defRPr>
             </a:pPr>
             <a:r>
-              <a:t>• cosine specificity: median 0.067, q90 0.109, max 0.394</a:t>
+              <a:t>• FDR-controlled (gene-permutation null, 108,400 draws + BH): q&lt;0.05 → 3 TFs, q&lt;0.10 → 89 TFs.</a:t>
             </a:r>
           </a:p>
           <a:p>
@@ -4317,7 +4317,7 @@
               </a:defRPr>
             </a:pPr>
             <a:r>
-              <a:t>• confidently annotated (spec&gt;0.12): 73 TFs  —  vs only 13 with the mouse MOCA reference.</a:t>
+              <a:t>• Heuristic spec&gt;0.12 flags 73 (vs 13 with mouse) — but only 3/89 survive FDR: 172 collinear types ⇒ heavy null tail.</a:t>
             </a:r>
           </a:p>
           <a:p>
@@ -4333,7 +4333,7 @@
               </a:defRPr>
             </a:pPr>
             <a:r>
-              <a:t>• cond(DᵀD)=1.1e+17 → collinear signatures, so unconstrained OLS/NNLS are ill-conditioned; cosine is the stable choice (README finding, re-confirmed).</a:t>
+              <a:t>• cond(DᵀD)=1e+17 ⇒ NNLS/OLS/ridge degenerate (0 calls); cosine is the stable method.</a:t>
             </a:r>
           </a:p>
         </p:txBody>
@@ -4407,7 +4407,7 @@
           <a:lstStyle/>
           <a:p>
             <a:pPr algn="l">
-              <a:defRPr sz="1300" b="0" i="0">
+              <a:defRPr sz="1250" b="0" i="0">
                 <a:solidFill>
                   <a:srgbClr val="1A1A2E"/>
                 </a:solidFill>
@@ -4415,7 +4415,7 @@
               </a:defRPr>
             </a:pPr>
             <a:r>
-              <a:t>Chosen: cosine alignment + specificity gate. The human reference is the same family the Joung paper used; the upgrade vs mouse is gene retention (no orthology loss) → more confident calls.</a:t>
+              <a:t>Chosen: cosine + permutation-FDR gate. Human ref (no orthology loss) gives far more candidate calls than mouse, but proper FDR shows the labels are still sparse → use the q&lt;0.10 / top-decile set as the confident pool, with care.</a:t>
             </a:r>
           </a:p>
         </p:txBody>

--- a/slides/exp17_19_overview.pptx
+++ b/slides/exp17_19_overview.pptx
@@ -3660,7 +3660,7 @@
                         </a:defRPr>
                       </a:pPr>
                       <a:r>
-                        <a:t>#conf(&gt;0.12)</a:t>
+                        <a:t>#(q&lt;0.05)</a:t>
                       </a:r>
                     </a:p>
                   </a:txBody>
@@ -3684,7 +3684,7 @@
                         </a:defRPr>
                       </a:pPr>
                       <a:r>
-                        <a:t>#conf(&gt;0.05)</a:t>
+                        <a:t>#(q&lt;0.10)</a:t>
                       </a:r>
                     </a:p>
                   </a:txBody>
@@ -3782,7 +3782,7 @@
                         </a:defRPr>
                       </a:pPr>
                       <a:r>
-                        <a:t>73</a:t>
+                        <a:t>3</a:t>
                       </a:r>
                     </a:p>
                   </a:txBody>
@@ -3806,7 +3806,7 @@
                         </a:defRPr>
                       </a:pPr>
                       <a:r>
-                        <a:t>949</a:t>
+                        <a:t>89</a:t>
                       </a:r>
                     </a:p>
                   </a:txBody>
@@ -3904,7 +3904,7 @@
                         </a:defRPr>
                       </a:pPr>
                       <a:r>
-                        <a:t>0</a:t>
+                        <a:t>0†</a:t>
                       </a:r>
                     </a:p>
                   </a:txBody>
@@ -3928,7 +3928,7 @@
                         </a:defRPr>
                       </a:pPr>
                       <a:r>
-                        <a:t>0</a:t>
+                        <a:t>0†</a:t>
                       </a:r>
                     </a:p>
                   </a:txBody>
@@ -4026,7 +4026,7 @@
                         </a:defRPr>
                       </a:pPr>
                       <a:r>
-                        <a:t>0</a:t>
+                        <a:t>0†</a:t>
                       </a:r>
                     </a:p>
                   </a:txBody>
@@ -4050,7 +4050,7 @@
                         </a:defRPr>
                       </a:pPr>
                       <a:r>
-                        <a:t>0</a:t>
+                        <a:t>0†</a:t>
                       </a:r>
                     </a:p>
                   </a:txBody>
@@ -4148,7 +4148,7 @@
                         </a:defRPr>
                       </a:pPr>
                       <a:r>
-                        <a:t>0</a:t>
+                        <a:t>0†</a:t>
                       </a:r>
                     </a:p>
                   </a:txBody>
@@ -4172,7 +4172,7 @@
                         </a:defRPr>
                       </a:pPr>
                       <a:r>
-                        <a:t>0</a:t>
+                        <a:t>0†</a:t>
                       </a:r>
                     </a:p>
                   </a:txBody>
@@ -4238,6 +4238,42 @@
       <p:sp>
         <p:nvSpPr>
           <p:cNvPr id="11" name="TextBox 10"/>
+          <p:cNvSpPr txBox="1"/>
+          <p:nvPr/>
+        </p:nvSpPr>
+        <p:spPr>
+          <a:xfrm>
+            <a:off x="6537960" y="2852928"/>
+            <a:ext cx="5166360" cy="274320"/>
+          </a:xfrm>
+          <a:prstGeom prst="rect">
+            <a:avLst/>
+          </a:prstGeom>
+          <a:noFill/>
+        </p:spPr>
+        <p:txBody>
+          <a:bodyPr wrap="square">
+            <a:spAutoFit/>
+          </a:bodyPr>
+          <a:lstStyle/>
+          <a:p>
+            <a:pPr algn="l">
+              <a:defRPr sz="800" b="0" i="1">
+                <a:solidFill>
+                  <a:srgbClr val="666666"/>
+                </a:solidFill>
+                <a:latin typeface="Calibri"/>
+              </a:defRPr>
+            </a:pPr>
+            <a:r>
+              <a:t>† FDR run on cosine (chosen); nnls/ols/ridge at null floor → 0 at any FDR</a:t>
+            </a:r>
+          </a:p>
+        </p:txBody>
+      </p:sp>
+      <p:sp>
+        <p:nvSpPr>
+          <p:cNvPr id="12" name="TextBox 11"/>
           <p:cNvSpPr txBox="1"/>
           <p:nvPr/>
         </p:nvSpPr>
@@ -4340,7 +4376,7 @@
       </p:sp>
       <p:sp>
         <p:nvSpPr>
-          <p:cNvPr id="12" name="Rounded Rectangle 11"/>
+          <p:cNvPr id="13" name="Rounded Rectangle 12"/>
           <p:cNvSpPr/>
           <p:nvPr/>
         </p:nvSpPr>
@@ -4386,7 +4422,7 @@
       </p:sp>
       <p:sp>
         <p:nvSpPr>
-          <p:cNvPr id="13" name="TextBox 12"/>
+          <p:cNvPr id="14" name="TextBox 13"/>
           <p:cNvSpPr txBox="1"/>
           <p:nvPr/>
         </p:nvSpPr>

--- a/slides/exp17_19_overview.pptx
+++ b/slides/exp17_19_overview.pptx
@@ -3330,7 +3330,7 @@
         <p:spPr>
           <a:xfrm>
             <a:off x="274320" y="914400"/>
-            <a:ext cx="5852160" cy="4617720"/>
+            <a:ext cx="5577840" cy="4617720"/>
           </a:xfrm>
           <a:prstGeom prst="roundRect">
             <a:avLst/>
@@ -3376,7 +3376,7 @@
         <p:spPr>
           <a:xfrm>
             <a:off x="457200" y="1005840"/>
-            <a:ext cx="5486400" cy="365760"/>
+            <a:ext cx="5212080" cy="365760"/>
           </a:xfrm>
           <a:prstGeom prst="rect">
             <a:avLst/>
@@ -3412,7 +3412,7 @@
         <p:spPr>
           <a:xfrm>
             <a:off x="457200" y="1417320"/>
-            <a:ext cx="5486400" cy="2377440"/>
+            <a:ext cx="5212080" cy="2377440"/>
           </a:xfrm>
           <a:prstGeom prst="rect">
             <a:avLst/>
@@ -3429,7 +3429,7 @@
               <a:spcAft>
                 <a:spcPts val="500"/>
               </a:spcAft>
-              <a:defRPr sz="1200">
+              <a:defRPr sz="1150">
                 <a:solidFill>
                   <a:srgbClr val="000000"/>
                 </a:solidFill>
@@ -3445,7 +3445,7 @@
               <a:spcAft>
                 <a:spcPts val="500"/>
               </a:spcAft>
-              <a:defRPr sz="1200">
+              <a:defRPr sz="1150">
                 <a:solidFill>
                   <a:srgbClr val="000000"/>
                 </a:solidFill>
@@ -3453,7 +3453,7 @@
               </a:defRPr>
             </a:pPr>
             <a:r>
-              <a:t>• Reference: Cao 2020 human fetal atlas (GSE156793) — 172 organ-cell-type expression signatures Dc = mean(type c) − mean over types.</a:t>
+              <a:t>• Reference: Cao 2020 human fetal atlas (GSE156793) — cell-level matched-norm signatures Dc (165 cell types).</a:t>
             </a:r>
           </a:p>
           <a:p>
@@ -3461,7 +3461,7 @@
               <a:spcAft>
                 <a:spcPts val="500"/>
               </a:spcAft>
-              <a:defRPr sz="1200">
+              <a:defRPr sz="1150">
                 <a:solidFill>
                   <a:srgbClr val="000000"/>
                 </a:solidFill>
@@ -3469,7 +3469,7 @@
               </a:defRPr>
             </a:pPr>
             <a:r>
-              <a:t>• Score = alignment(Δ, Dc) after stripping the shared OE nuisance axes (top-4 SVD of the centred TF-shift matrix).</a:t>
+              <a:t>• Score = cos(Δ, Dc) after stripping the shared OE nuisance axes (top-4 SVD of the centred TF-shift matrix).</a:t>
             </a:r>
           </a:p>
           <a:p>
@@ -3477,7 +3477,7 @@
               <a:spcAft>
                 <a:spcPts val="500"/>
               </a:spcAft>
-              <a:defRPr sz="1200">
+              <a:defRPr sz="1150">
                 <a:solidFill>
                   <a:srgbClr val="000000"/>
                 </a:solidFill>
@@ -3485,7 +3485,23 @@
               </a:defRPr>
             </a:pPr>
             <a:r>
-              <a:t>• Human reference ⇒ NO mouse→human orthology step: direct symbol match keeps ~all 9,923 Joung HVGs (vs the ~15k mouse-ortholog subset).</a:t>
+              <a:t>• Human ref ⇒ NO mouse orthology step: direct symbol match keeps ~all Joung HVGs.</a:t>
+            </a:r>
+          </a:p>
+          <a:p>
+            <a:pPr>
+              <a:spcAft>
+                <a:spcPts val="500"/>
+              </a:spcAft>
+              <a:defRPr sz="1150">
+                <a:solidFill>
+                  <a:srgbClr val="000000"/>
+                </a:solidFill>
+                <a:latin typeface="Calibri"/>
+              </a:defRPr>
+            </a:pPr>
+            <a:r>
+              <a:t>• Method CHOSEN by recall against the Joung-paper experimentally-validated TF→fate set (right) — not a self-curated benchmark.</a:t>
             </a:r>
           </a:p>
         </p:txBody>
@@ -3506,8 +3522,8 @@
         </p:blipFill>
         <p:spPr>
           <a:xfrm>
-            <a:off x="457200" y="3886200"/>
-            <a:ext cx="5486400" cy="1368565"/>
+            <a:off x="457200" y="4069080"/>
+            <a:ext cx="5212080" cy="1340424"/>
           </a:xfrm>
           <a:prstGeom prst="rect">
             <a:avLst/>
@@ -3522,8 +3538,8 @@
         </p:nvSpPr>
         <p:spPr>
           <a:xfrm>
-            <a:off x="6355080" y="914400"/>
-            <a:ext cx="5532120" cy="4617720"/>
+            <a:off x="5989320" y="914400"/>
+            <a:ext cx="5897880" cy="4617720"/>
           </a:xfrm>
           <a:prstGeom prst="roundRect">
             <a:avLst/>
@@ -3568,8 +3584,8 @@
         </p:nvSpPr>
         <p:spPr>
           <a:xfrm>
-            <a:off x="6537960" y="1005840"/>
-            <a:ext cx="5212080" cy="365760"/>
+            <a:off x="6172200" y="978408"/>
+            <a:ext cx="5577840" cy="365760"/>
           </a:xfrm>
           <a:prstGeom prst="rect">
             <a:avLst/>
@@ -3591,650 +3607,35 @@
               </a:defRPr>
             </a:pPr>
             <a:r>
-              <a:t>Method shoot-out (chosen: cosine)</a:t>
-            </a:r>
-          </a:p>
-        </p:txBody>
-      </p:sp>
-      <p:graphicFrame>
-        <p:nvGraphicFramePr>
-          <p:cNvPr id="10" name="Table 9"/>
-          <p:cNvGraphicFramePr>
-            <a:graphicFrameLocks noGrp="1"/>
-          </p:cNvGraphicFramePr>
+              <a:t>Validated vs the Joung paper ground truth</a:t>
+            </a:r>
+          </a:p>
+        </p:txBody>
+      </p:sp>
+      <p:pic>
+        <p:nvPicPr>
+          <p:cNvPr id="10" name="Picture 9" descr="exp17_annotation_recall.png"/>
+          <p:cNvPicPr>
+            <a:picLocks noChangeAspect="1"/>
+          </p:cNvPicPr>
           <p:nvPr/>
-        </p:nvGraphicFramePr>
-        <p:xfrm>
-          <a:off x="6537960" y="1417320"/>
-          <a:ext cx="5486400" cy="1371600"/>
-        </p:xfrm>
-        <a:graphic>
-          <a:graphicData uri="http://schemas.openxmlformats.org/drawingml/2006/table">
-            <a:tbl>
-              <a:tblPr firstRow="1" bandRow="1">
-                <a:tableStyleId>{5C22544A-7EE6-4342-B048-85BDC9FD1C3A}</a:tableStyleId>
-              </a:tblPr>
-              <a:tblGrid>
-                <a:gridCol w="1371600"/>
-                <a:gridCol w="1143000"/>
-                <a:gridCol w="1143000"/>
-                <a:gridCol w="914400"/>
-                <a:gridCol w="914400"/>
-              </a:tblGrid>
-              <a:tr h="274320">
-                <a:tc>
-                  <a:txBody>
-                    <a:bodyPr/>
-                    <a:lstStyle/>
-                    <a:p>
-                      <a:pPr>
-                        <a:defRPr sz="1100" b="1">
-                          <a:solidFill>
-                            <a:srgbClr val="FFFFFF"/>
-                          </a:solidFill>
-                          <a:latin typeface="Calibri"/>
-                        </a:defRPr>
-                      </a:pPr>
-                      <a:r>
-                        <a:t>method</a:t>
-                      </a:r>
-                    </a:p>
-                  </a:txBody>
-                  <a:tcPr marT="25400" marB="25400">
-                    <a:solidFill>
-                      <a:srgbClr val="0B3D91"/>
-                    </a:solidFill>
-                  </a:tcPr>
-                </a:tc>
-                <a:tc>
-                  <a:txBody>
-                    <a:bodyPr/>
-                    <a:lstStyle/>
-                    <a:p>
-                      <a:pPr>
-                        <a:defRPr sz="1100" b="1">
-                          <a:solidFill>
-                            <a:srgbClr val="FFFFFF"/>
-                          </a:solidFill>
-                          <a:latin typeface="Calibri"/>
-                        </a:defRPr>
-                      </a:pPr>
-                      <a:r>
-                        <a:t>#(q&lt;0.05)</a:t>
-                      </a:r>
-                    </a:p>
-                  </a:txBody>
-                  <a:tcPr marT="25400" marB="25400">
-                    <a:solidFill>
-                      <a:srgbClr val="0B3D91"/>
-                    </a:solidFill>
-                  </a:tcPr>
-                </a:tc>
-                <a:tc>
-                  <a:txBody>
-                    <a:bodyPr/>
-                    <a:lstStyle/>
-                    <a:p>
-                      <a:pPr>
-                        <a:defRPr sz="1100" b="1">
-                          <a:solidFill>
-                            <a:srgbClr val="FFFFFF"/>
-                          </a:solidFill>
-                          <a:latin typeface="Calibri"/>
-                        </a:defRPr>
-                      </a:pPr>
-                      <a:r>
-                        <a:t>#(q&lt;0.10)</a:t>
-                      </a:r>
-                    </a:p>
-                  </a:txBody>
-                  <a:tcPr marT="25400" marB="25400">
-                    <a:solidFill>
-                      <a:srgbClr val="0B3D91"/>
-                    </a:solidFill>
-                  </a:tcPr>
-                </a:tc>
-                <a:tc>
-                  <a:txBody>
-                    <a:bodyPr/>
-                    <a:lstStyle/>
-                    <a:p>
-                      <a:pPr>
-                        <a:defRPr sz="1100" b="1">
-                          <a:solidFill>
-                            <a:srgbClr val="FFFFFF"/>
-                          </a:solidFill>
-                          <a:latin typeface="Calibri"/>
-                        </a:defRPr>
-                      </a:pPr>
-                      <a:r>
-                        <a:t>med spec</a:t>
-                      </a:r>
-                    </a:p>
-                  </a:txBody>
-                  <a:tcPr marT="25400" marB="25400">
-                    <a:solidFill>
-                      <a:srgbClr val="0B3D91"/>
-                    </a:solidFill>
-                  </a:tcPr>
-                </a:tc>
-                <a:tc>
-                  <a:txBody>
-                    <a:bodyPr/>
-                    <a:lstStyle/>
-                    <a:p>
-                      <a:pPr>
-                        <a:defRPr sz="1100" b="1">
-                          <a:solidFill>
-                            <a:srgbClr val="FFFFFF"/>
-                          </a:solidFill>
-                          <a:latin typeface="Calibri"/>
-                        </a:defRPr>
-                      </a:pPr>
-                      <a:r>
-                        <a:t>agree↔cos</a:t>
-                      </a:r>
-                    </a:p>
-                  </a:txBody>
-                  <a:tcPr marT="25400" marB="25400">
-                    <a:solidFill>
-                      <a:srgbClr val="0B3D91"/>
-                    </a:solidFill>
-                  </a:tcPr>
-                </a:tc>
-              </a:tr>
-              <a:tr h="274320">
-                <a:tc>
-                  <a:txBody>
-                    <a:bodyPr/>
-                    <a:lstStyle/>
-                    <a:p>
-                      <a:pPr>
-                        <a:defRPr sz="1100" b="0">
-                          <a:solidFill>
-                            <a:srgbClr val="000000"/>
-                          </a:solidFill>
-                          <a:latin typeface="Calibri"/>
-                        </a:defRPr>
-                      </a:pPr>
-                      <a:r>
-                        <a:t>cosine</a:t>
-                      </a:r>
-                    </a:p>
-                  </a:txBody>
-                  <a:tcPr marT="25400" marB="25400">
-                    <a:solidFill>
-                      <a:srgbClr val="F5F5F5"/>
-                    </a:solidFill>
-                  </a:tcPr>
-                </a:tc>
-                <a:tc>
-                  <a:txBody>
-                    <a:bodyPr/>
-                    <a:lstStyle/>
-                    <a:p>
-                      <a:pPr>
-                        <a:defRPr sz="1100" b="0">
-                          <a:solidFill>
-                            <a:srgbClr val="000000"/>
-                          </a:solidFill>
-                          <a:latin typeface="Calibri"/>
-                        </a:defRPr>
-                      </a:pPr>
-                      <a:r>
-                        <a:t>3</a:t>
-                      </a:r>
-                    </a:p>
-                  </a:txBody>
-                  <a:tcPr marT="25400" marB="25400">
-                    <a:solidFill>
-                      <a:srgbClr val="F5F5F5"/>
-                    </a:solidFill>
-                  </a:tcPr>
-                </a:tc>
-                <a:tc>
-                  <a:txBody>
-                    <a:bodyPr/>
-                    <a:lstStyle/>
-                    <a:p>
-                      <a:pPr>
-                        <a:defRPr sz="1100" b="0">
-                          <a:solidFill>
-                            <a:srgbClr val="000000"/>
-                          </a:solidFill>
-                          <a:latin typeface="Calibri"/>
-                        </a:defRPr>
-                      </a:pPr>
-                      <a:r>
-                        <a:t>89</a:t>
-                      </a:r>
-                    </a:p>
-                  </a:txBody>
-                  <a:tcPr marT="25400" marB="25400">
-                    <a:solidFill>
-                      <a:srgbClr val="F5F5F5"/>
-                    </a:solidFill>
-                  </a:tcPr>
-                </a:tc>
-                <a:tc>
-                  <a:txBody>
-                    <a:bodyPr/>
-                    <a:lstStyle/>
-                    <a:p>
-                      <a:pPr>
-                        <a:defRPr sz="1100" b="0">
-                          <a:solidFill>
-                            <a:srgbClr val="000000"/>
-                          </a:solidFill>
-                          <a:latin typeface="Calibri"/>
-                        </a:defRPr>
-                      </a:pPr>
-                      <a:r>
-                        <a:t>0.067</a:t>
-                      </a:r>
-                    </a:p>
-                  </a:txBody>
-                  <a:tcPr marT="25400" marB="25400">
-                    <a:solidFill>
-                      <a:srgbClr val="F5F5F5"/>
-                    </a:solidFill>
-                  </a:tcPr>
-                </a:tc>
-                <a:tc>
-                  <a:txBody>
-                    <a:bodyPr/>
-                    <a:lstStyle/>
-                    <a:p>
-                      <a:pPr>
-                        <a:defRPr sz="1100" b="0">
-                          <a:solidFill>
-                            <a:srgbClr val="000000"/>
-                          </a:solidFill>
-                          <a:latin typeface="Calibri"/>
-                        </a:defRPr>
-                      </a:pPr>
-                      <a:r>
-                        <a:t>1.00</a:t>
-                      </a:r>
-                    </a:p>
-                  </a:txBody>
-                  <a:tcPr marT="25400" marB="25400">
-                    <a:solidFill>
-                      <a:srgbClr val="F5F5F5"/>
-                    </a:solidFill>
-                  </a:tcPr>
-                </a:tc>
-              </a:tr>
-              <a:tr h="274320">
-                <a:tc>
-                  <a:txBody>
-                    <a:bodyPr/>
-                    <a:lstStyle/>
-                    <a:p>
-                      <a:pPr>
-                        <a:defRPr sz="1100" b="0">
-                          <a:solidFill>
-                            <a:srgbClr val="000000"/>
-                          </a:solidFill>
-                          <a:latin typeface="Calibri"/>
-                        </a:defRPr>
-                      </a:pPr>
-                      <a:r>
-                        <a:t>nnls</a:t>
-                      </a:r>
-                    </a:p>
-                  </a:txBody>
-                  <a:tcPr marT="25400" marB="25400">
-                    <a:solidFill>
-                      <a:srgbClr val="FFFFFF"/>
-                    </a:solidFill>
-                  </a:tcPr>
-                </a:tc>
-                <a:tc>
-                  <a:txBody>
-                    <a:bodyPr/>
-                    <a:lstStyle/>
-                    <a:p>
-                      <a:pPr>
-                        <a:defRPr sz="1100" b="0">
-                          <a:solidFill>
-                            <a:srgbClr val="000000"/>
-                          </a:solidFill>
-                          <a:latin typeface="Calibri"/>
-                        </a:defRPr>
-                      </a:pPr>
-                      <a:r>
-                        <a:t>0†</a:t>
-                      </a:r>
-                    </a:p>
-                  </a:txBody>
-                  <a:tcPr marT="25400" marB="25400">
-                    <a:solidFill>
-                      <a:srgbClr val="FFFFFF"/>
-                    </a:solidFill>
-                  </a:tcPr>
-                </a:tc>
-                <a:tc>
-                  <a:txBody>
-                    <a:bodyPr/>
-                    <a:lstStyle/>
-                    <a:p>
-                      <a:pPr>
-                        <a:defRPr sz="1100" b="0">
-                          <a:solidFill>
-                            <a:srgbClr val="000000"/>
-                          </a:solidFill>
-                          <a:latin typeface="Calibri"/>
-                        </a:defRPr>
-                      </a:pPr>
-                      <a:r>
-                        <a:t>0†</a:t>
-                      </a:r>
-                    </a:p>
-                  </a:txBody>
-                  <a:tcPr marT="25400" marB="25400">
-                    <a:solidFill>
-                      <a:srgbClr val="FFFFFF"/>
-                    </a:solidFill>
-                  </a:tcPr>
-                </a:tc>
-                <a:tc>
-                  <a:txBody>
-                    <a:bodyPr/>
-                    <a:lstStyle/>
-                    <a:p>
-                      <a:pPr>
-                        <a:defRPr sz="1100" b="0">
-                          <a:solidFill>
-                            <a:srgbClr val="000000"/>
-                          </a:solidFill>
-                          <a:latin typeface="Calibri"/>
-                        </a:defRPr>
-                      </a:pPr>
-                      <a:r>
-                        <a:t>0.020</a:t>
-                      </a:r>
-                    </a:p>
-                  </a:txBody>
-                  <a:tcPr marT="25400" marB="25400">
-                    <a:solidFill>
-                      <a:srgbClr val="FFFFFF"/>
-                    </a:solidFill>
-                  </a:tcPr>
-                </a:tc>
-                <a:tc>
-                  <a:txBody>
-                    <a:bodyPr/>
-                    <a:lstStyle/>
-                    <a:p>
-                      <a:pPr>
-                        <a:defRPr sz="1100" b="0">
-                          <a:solidFill>
-                            <a:srgbClr val="000000"/>
-                          </a:solidFill>
-                          <a:latin typeface="Calibri"/>
-                        </a:defRPr>
-                      </a:pPr>
-                      <a:r>
-                        <a:t>0.02</a:t>
-                      </a:r>
-                    </a:p>
-                  </a:txBody>
-                  <a:tcPr marT="25400" marB="25400">
-                    <a:solidFill>
-                      <a:srgbClr val="FFFFFF"/>
-                    </a:solidFill>
-                  </a:tcPr>
-                </a:tc>
-              </a:tr>
-              <a:tr h="274320">
-                <a:tc>
-                  <a:txBody>
-                    <a:bodyPr/>
-                    <a:lstStyle/>
-                    <a:p>
-                      <a:pPr>
-                        <a:defRPr sz="1100" b="0">
-                          <a:solidFill>
-                            <a:srgbClr val="000000"/>
-                          </a:solidFill>
-                          <a:latin typeface="Calibri"/>
-                        </a:defRPr>
-                      </a:pPr>
-                      <a:r>
-                        <a:t>ols</a:t>
-                      </a:r>
-                    </a:p>
-                  </a:txBody>
-                  <a:tcPr marT="25400" marB="25400">
-                    <a:solidFill>
-                      <a:srgbClr val="F5F5F5"/>
-                    </a:solidFill>
-                  </a:tcPr>
-                </a:tc>
-                <a:tc>
-                  <a:txBody>
-                    <a:bodyPr/>
-                    <a:lstStyle/>
-                    <a:p>
-                      <a:pPr>
-                        <a:defRPr sz="1100" b="0">
-                          <a:solidFill>
-                            <a:srgbClr val="000000"/>
-                          </a:solidFill>
-                          <a:latin typeface="Calibri"/>
-                        </a:defRPr>
-                      </a:pPr>
-                      <a:r>
-                        <a:t>0†</a:t>
-                      </a:r>
-                    </a:p>
-                  </a:txBody>
-                  <a:tcPr marT="25400" marB="25400">
-                    <a:solidFill>
-                      <a:srgbClr val="F5F5F5"/>
-                    </a:solidFill>
-                  </a:tcPr>
-                </a:tc>
-                <a:tc>
-                  <a:txBody>
-                    <a:bodyPr/>
-                    <a:lstStyle/>
-                    <a:p>
-                      <a:pPr>
-                        <a:defRPr sz="1100" b="0">
-                          <a:solidFill>
-                            <a:srgbClr val="000000"/>
-                          </a:solidFill>
-                          <a:latin typeface="Calibri"/>
-                        </a:defRPr>
-                      </a:pPr>
-                      <a:r>
-                        <a:t>0†</a:t>
-                      </a:r>
-                    </a:p>
-                  </a:txBody>
-                  <a:tcPr marT="25400" marB="25400">
-                    <a:solidFill>
-                      <a:srgbClr val="F5F5F5"/>
-                    </a:solidFill>
-                  </a:tcPr>
-                </a:tc>
-                <a:tc>
-                  <a:txBody>
-                    <a:bodyPr/>
-                    <a:lstStyle/>
-                    <a:p>
-                      <a:pPr>
-                        <a:defRPr sz="1100" b="0">
-                          <a:solidFill>
-                            <a:srgbClr val="000000"/>
-                          </a:solidFill>
-                          <a:latin typeface="Calibri"/>
-                        </a:defRPr>
-                      </a:pPr>
-                      <a:r>
-                        <a:t>0.000</a:t>
-                      </a:r>
-                    </a:p>
-                  </a:txBody>
-                  <a:tcPr marT="25400" marB="25400">
-                    <a:solidFill>
-                      <a:srgbClr val="F5F5F5"/>
-                    </a:solidFill>
-                  </a:tcPr>
-                </a:tc>
-                <a:tc>
-                  <a:txBody>
-                    <a:bodyPr/>
-                    <a:lstStyle/>
-                    <a:p>
-                      <a:pPr>
-                        <a:defRPr sz="1100" b="0">
-                          <a:solidFill>
-                            <a:srgbClr val="000000"/>
-                          </a:solidFill>
-                          <a:latin typeface="Calibri"/>
-                        </a:defRPr>
-                      </a:pPr>
-                      <a:r>
-                        <a:t>0.02</a:t>
-                      </a:r>
-                    </a:p>
-                  </a:txBody>
-                  <a:tcPr marT="25400" marB="25400">
-                    <a:solidFill>
-                      <a:srgbClr val="F5F5F5"/>
-                    </a:solidFill>
-                  </a:tcPr>
-                </a:tc>
-              </a:tr>
-              <a:tr h="274320">
-                <a:tc>
-                  <a:txBody>
-                    <a:bodyPr/>
-                    <a:lstStyle/>
-                    <a:p>
-                      <a:pPr>
-                        <a:defRPr sz="1100" b="0">
-                          <a:solidFill>
-                            <a:srgbClr val="000000"/>
-                          </a:solidFill>
-                          <a:latin typeface="Calibri"/>
-                        </a:defRPr>
-                      </a:pPr>
-                      <a:r>
-                        <a:t>ridge</a:t>
-                      </a:r>
-                    </a:p>
-                  </a:txBody>
-                  <a:tcPr marT="25400" marB="25400">
-                    <a:solidFill>
-                      <a:srgbClr val="FFFFFF"/>
-                    </a:solidFill>
-                  </a:tcPr>
-                </a:tc>
-                <a:tc>
-                  <a:txBody>
-                    <a:bodyPr/>
-                    <a:lstStyle/>
-                    <a:p>
-                      <a:pPr>
-                        <a:defRPr sz="1100" b="0">
-                          <a:solidFill>
-                            <a:srgbClr val="000000"/>
-                          </a:solidFill>
-                          <a:latin typeface="Calibri"/>
-                        </a:defRPr>
-                      </a:pPr>
-                      <a:r>
-                        <a:t>0†</a:t>
-                      </a:r>
-                    </a:p>
-                  </a:txBody>
-                  <a:tcPr marT="25400" marB="25400">
-                    <a:solidFill>
-                      <a:srgbClr val="FFFFFF"/>
-                    </a:solidFill>
-                  </a:tcPr>
-                </a:tc>
-                <a:tc>
-                  <a:txBody>
-                    <a:bodyPr/>
-                    <a:lstStyle/>
-                    <a:p>
-                      <a:pPr>
-                        <a:defRPr sz="1100" b="0">
-                          <a:solidFill>
-                            <a:srgbClr val="000000"/>
-                          </a:solidFill>
-                          <a:latin typeface="Calibri"/>
-                        </a:defRPr>
-                      </a:pPr>
-                      <a:r>
-                        <a:t>0†</a:t>
-                      </a:r>
-                    </a:p>
-                  </a:txBody>
-                  <a:tcPr marT="25400" marB="25400">
-                    <a:solidFill>
-                      <a:srgbClr val="FFFFFF"/>
-                    </a:solidFill>
-                  </a:tcPr>
-                </a:tc>
-                <a:tc>
-                  <a:txBody>
-                    <a:bodyPr/>
-                    <a:lstStyle/>
-                    <a:p>
-                      <a:pPr>
-                        <a:defRPr sz="1100" b="0">
-                          <a:solidFill>
-                            <a:srgbClr val="000000"/>
-                          </a:solidFill>
-                          <a:latin typeface="Calibri"/>
-                        </a:defRPr>
-                      </a:pPr>
-                      <a:r>
-                        <a:t>0.000</a:t>
-                      </a:r>
-                    </a:p>
-                  </a:txBody>
-                  <a:tcPr marT="25400" marB="25400">
-                    <a:solidFill>
-                      <a:srgbClr val="FFFFFF"/>
-                    </a:solidFill>
-                  </a:tcPr>
-                </a:tc>
-                <a:tc>
-                  <a:txBody>
-                    <a:bodyPr/>
-                    <a:lstStyle/>
-                    <a:p>
-                      <a:pPr>
-                        <a:defRPr sz="1100" b="0">
-                          <a:solidFill>
-                            <a:srgbClr val="000000"/>
-                          </a:solidFill>
-                          <a:latin typeface="Calibri"/>
-                        </a:defRPr>
-                      </a:pPr>
-                      <a:r>
-                        <a:t>0.02</a:t>
-                      </a:r>
-                    </a:p>
-                  </a:txBody>
-                  <a:tcPr marT="25400" marB="25400">
-                    <a:solidFill>
-                      <a:srgbClr val="FFFFFF"/>
-                    </a:solidFill>
-                  </a:tcPr>
-                </a:tc>
-              </a:tr>
-            </a:tbl>
-          </a:graphicData>
-        </a:graphic>
-      </p:graphicFrame>
+        </p:nvPicPr>
+        <p:blipFill>
+          <a:blip r:embed="rId3"/>
+          <a:stretch>
+            <a:fillRect/>
+          </a:stretch>
+        </p:blipFill>
+        <p:spPr>
+          <a:xfrm>
+            <a:off x="6355080" y="1325880"/>
+            <a:ext cx="4032504" cy="2240280"/>
+          </a:xfrm>
+          <a:prstGeom prst="rect">
+            <a:avLst/>
+          </a:prstGeom>
+        </p:spPr>
+      </p:pic>
       <p:sp>
         <p:nvSpPr>
           <p:cNvPr id="11" name="TextBox 10"/>
@@ -4243,8 +3644,8 @@
         </p:nvSpPr>
         <p:spPr>
           <a:xfrm>
-            <a:off x="6537960" y="2852928"/>
-            <a:ext cx="5166360" cy="274320"/>
+            <a:off x="6126480" y="3703320"/>
+            <a:ext cx="5669280" cy="1828800"/>
           </a:xfrm>
           <a:prstGeom prst="rect">
             <a:avLst/>
@@ -4257,47 +3658,11 @@
           </a:bodyPr>
           <a:lstStyle/>
           <a:p>
-            <a:pPr algn="l">
-              <a:defRPr sz="800" b="0" i="1">
-                <a:solidFill>
-                  <a:srgbClr val="666666"/>
-                </a:solidFill>
-                <a:latin typeface="Calibri"/>
-              </a:defRPr>
-            </a:pPr>
-            <a:r>
-              <a:t>† FDR run on cosine (chosen); nnls/ols/ridge at null floor → 0 at any FDR</a:t>
-            </a:r>
-          </a:p>
-        </p:txBody>
-      </p:sp>
-      <p:sp>
-        <p:nvSpPr>
-          <p:cNvPr id="12" name="TextBox 11"/>
-          <p:cNvSpPr txBox="1"/>
-          <p:nvPr/>
-        </p:nvSpPr>
-        <p:spPr>
-          <a:xfrm>
-            <a:off x="6537960" y="3291840"/>
-            <a:ext cx="5212080" cy="2194560"/>
-          </a:xfrm>
-          <a:prstGeom prst="rect">
-            <a:avLst/>
-          </a:prstGeom>
-          <a:noFill/>
-        </p:spPr>
-        <p:txBody>
-          <a:bodyPr wrap="square">
-            <a:spAutoFit/>
-          </a:bodyPr>
-          <a:lstStyle/>
-          <a:p>
             <a:pPr>
               <a:spcAft>
-                <a:spcPts val="500"/>
+                <a:spcPts val="400"/>
               </a:spcAft>
-              <a:defRPr sz="1100">
+              <a:defRPr sz="1050">
                 <a:solidFill>
                   <a:srgbClr val="000000"/>
                 </a:solidFill>
@@ -4305,15 +3670,15 @@
               </a:defRPr>
             </a:pPr>
             <a:r>
-              <a:t>• TFs scored (n≥50): 1084  |  cell types: 172  |  shared genes: 6557</a:t>
+              <a:t>• GT = 18 TFs Joung NOMINATED (Fig 3D) + experimentally VALIDATED (Fig 4); 17 scorable, same Cao reference.</a:t>
             </a:r>
           </a:p>
           <a:p>
             <a:pPr>
               <a:spcAft>
-                <a:spcPts val="500"/>
+                <a:spcPts val="400"/>
               </a:spcAft>
-              <a:defRPr sz="1100">
+              <a:defRPr sz="1050">
                 <a:solidFill>
                   <a:srgbClr val="000000"/>
                 </a:solidFill>
@@ -4321,15 +3686,15 @@
               </a:defRPr>
             </a:pPr>
             <a:r>
-              <a:t>• cosine specificity: median 0.067, q90 0.109, max 0.394</a:t>
+              <a:t>• Reachable pool (82 of 172 types the assay can make): cosine_celllevel &amp; LRsig recall@1=0.31 (4.4× chance), r@5 0.69, median rank 3; shipped cosine_S6 lags (r@1 0.25).</a:t>
             </a:r>
           </a:p>
           <a:p>
             <a:pPr>
               <a:spcAft>
-                <a:spcPts val="500"/>
+                <a:spcPts val="400"/>
               </a:spcAft>
-              <a:defRPr sz="1100">
+              <a:defRPr sz="1050">
                 <a:solidFill>
                   <a:srgbClr val="000000"/>
                 </a:solidFill>
@@ -4337,15 +3702,15 @@
               </a:defRPr>
             </a:pPr>
             <a:r>
-              <a:t>• FDR-controlled (gene-permutation null, 108,400 draws + BH): q&lt;0.05 → 3 TFs, q&lt;0.10 → 89 TFs.</a:t>
+              <a:t>• CellTypist per-cell ΔP fails (r@1 0.00; saturates to 1 label) — shared hESC baseline.</a:t>
             </a:r>
           </a:p>
           <a:p>
             <a:pPr>
               <a:spcAft>
-                <a:spcPts val="500"/>
+                <a:spcPts val="400"/>
               </a:spcAft>
-              <a:defRPr sz="1100">
+              <a:defRPr sz="1050">
                 <a:solidFill>
                   <a:srgbClr val="000000"/>
                 </a:solidFill>
@@ -4353,30 +3718,14 @@
               </a:defRPr>
             </a:pPr>
             <a:r>
-              <a:t>• Heuristic spec&gt;0.12 flags 73 (vs 13 with mouse) — but only 3/89 survive FDR: 172 collinear types ⇒ heavy null tail.</a:t>
-            </a:r>
-          </a:p>
-          <a:p>
-            <a:pPr>
-              <a:spcAft>
-                <a:spcPts val="500"/>
-              </a:spcAft>
-              <a:defRPr sz="1100">
-                <a:solidFill>
-                  <a:srgbClr val="000000"/>
-                </a:solidFill>
-                <a:latin typeface="Calibri"/>
-              </a:defRPr>
-            </a:pPr>
-            <a:r>
-              <a:t>• cond(DᵀD)=1e+17 ⇒ NNLS/OLS/ridge degenerate (0 calls); cosine is the stable method.</a:t>
-            </a:r>
-          </a:p>
-        </p:txBody>
-      </p:sp>
-      <p:sp>
-        <p:nvSpPr>
-          <p:cNvPr id="13" name="Rounded Rectangle 12"/>
+              <a:t>• Production: cosine_celllevel on all 1084 TFs → 84 at q&lt;0.10, 109 top-decile (perm-FDR).</a:t>
+            </a:r>
+          </a:p>
+        </p:txBody>
+      </p:sp>
+      <p:sp>
+        <p:nvSpPr>
+          <p:cNvPr id="12" name="Rounded Rectangle 11"/>
           <p:cNvSpPr/>
           <p:nvPr/>
         </p:nvSpPr>
@@ -4422,14 +3771,14 @@
       </p:sp>
       <p:sp>
         <p:nvSpPr>
-          <p:cNvPr id="14" name="TextBox 13"/>
+          <p:cNvPr id="13" name="TextBox 12"/>
           <p:cNvSpPr txBox="1"/>
           <p:nvPr/>
         </p:nvSpPr>
         <p:spPr>
           <a:xfrm>
-            <a:off x="502920" y="5852160"/>
-            <a:ext cx="11247120" cy="548640"/>
+            <a:off x="502920" y="5833872"/>
+            <a:ext cx="11247120" cy="566928"/>
           </a:xfrm>
           <a:prstGeom prst="rect">
             <a:avLst/>
@@ -4443,7 +3792,7 @@
           <a:lstStyle/>
           <a:p>
             <a:pPr algn="l">
-              <a:defRPr sz="1250" b="0" i="0">
+              <a:defRPr sz="1200" b="0" i="0">
                 <a:solidFill>
                   <a:srgbClr val="1A1A2E"/>
                 </a:solidFill>
@@ -4451,7 +3800,7 @@
               </a:defRPr>
             </a:pPr>
             <a:r>
-              <a:t>Chosen: cosine + permutation-FDR gate. Human ref (no orthology loss) gives far more candidate calls than mouse, but proper FDR shows the labels are still sparse → use the q&lt;0.10 / top-decile set as the confident pool, with care.</a:t>
+              <a:t>Chosen: cosine on cell-level matched-norm human-fetal signatures. On the paper's OWN validated TF→fate set it reaches 4.4× chance top-1 (correct fate in top-2 by median rank) — far above the shipped aggregate signature; CellTypist per-cell saturates.</a:t>
             </a:r>
           </a:p>
         </p:txBody>
@@ -9287,7 +8636,7 @@
                         </a:defRPr>
                       </a:pPr>
                       <a:r>
-                        <a:t>swap mouse→human reference</a:t>
+                        <a:t>cosine on cell-level human-fetal sigs; paper-validated</a:t>
                       </a:r>
                     </a:p>
                   </a:txBody>
@@ -9311,7 +8660,7 @@
                         </a:defRPr>
                       </a:pPr>
                       <a:r>
-                        <a:t>more confident fate labels → enable fate-reward / RL identifiability</a:t>
+                        <a:t>4.4× chance top-1 on Joung's validated TF→fate set → fate-reward / RL identifiability</a:t>
                       </a:r>
                     </a:p>
                   </a:txBody>
